--- a/ゲーム科2年/00_前期/ゲームエンジンⅢ/Unity_HDRP/01_HDプロジェクト作成.pptx
+++ b/ゲーム科2年/00_前期/ゲームエンジンⅢ/Unity_HDRP/01_HDプロジェクト作成.pptx
@@ -263,7 +263,7 @@
           <a:p>
             <a:fld id="{E9CC885B-4903-4D54-9A93-00025F12DED9}" type="datetimeFigureOut">
               <a:rPr kumimoji="1" lang="ja-JP" altLang="en-US" smtClean="0"/>
-              <a:t>2026/1/7</a:t>
+              <a:t>2026/1/9</a:t>
             </a:fld>
             <a:endParaRPr kumimoji="1" lang="ja-JP" altLang="en-US"/>
           </a:p>
@@ -493,7 +493,7 @@
           <a:p>
             <a:fld id="{E9CC885B-4903-4D54-9A93-00025F12DED9}" type="datetimeFigureOut">
               <a:rPr kumimoji="1" lang="ja-JP" altLang="en-US" smtClean="0"/>
-              <a:t>2026/1/7</a:t>
+              <a:t>2026/1/9</a:t>
             </a:fld>
             <a:endParaRPr kumimoji="1" lang="ja-JP" altLang="en-US"/>
           </a:p>
@@ -733,7 +733,7 @@
           <a:p>
             <a:fld id="{E9CC885B-4903-4D54-9A93-00025F12DED9}" type="datetimeFigureOut">
               <a:rPr kumimoji="1" lang="ja-JP" altLang="en-US" smtClean="0"/>
-              <a:t>2026/1/7</a:t>
+              <a:t>2026/1/9</a:t>
             </a:fld>
             <a:endParaRPr kumimoji="1" lang="ja-JP" altLang="en-US"/>
           </a:p>
@@ -963,7 +963,7 @@
           <a:p>
             <a:fld id="{E9CC885B-4903-4D54-9A93-00025F12DED9}" type="datetimeFigureOut">
               <a:rPr kumimoji="1" lang="ja-JP" altLang="en-US" smtClean="0"/>
-              <a:t>2026/1/7</a:t>
+              <a:t>2026/1/9</a:t>
             </a:fld>
             <a:endParaRPr kumimoji="1" lang="ja-JP" altLang="en-US"/>
           </a:p>
@@ -1238,7 +1238,7 @@
           <a:p>
             <a:fld id="{E9CC885B-4903-4D54-9A93-00025F12DED9}" type="datetimeFigureOut">
               <a:rPr kumimoji="1" lang="ja-JP" altLang="en-US" smtClean="0"/>
-              <a:t>2026/1/7</a:t>
+              <a:t>2026/1/9</a:t>
             </a:fld>
             <a:endParaRPr kumimoji="1" lang="ja-JP" altLang="en-US"/>
           </a:p>
@@ -1567,7 +1567,7 @@
           <a:p>
             <a:fld id="{E9CC885B-4903-4D54-9A93-00025F12DED9}" type="datetimeFigureOut">
               <a:rPr kumimoji="1" lang="ja-JP" altLang="en-US" smtClean="0"/>
-              <a:t>2026/1/7</a:t>
+              <a:t>2026/1/9</a:t>
             </a:fld>
             <a:endParaRPr kumimoji="1" lang="ja-JP" altLang="en-US"/>
           </a:p>
@@ -2043,7 +2043,7 @@
           <a:p>
             <a:fld id="{E9CC885B-4903-4D54-9A93-00025F12DED9}" type="datetimeFigureOut">
               <a:rPr kumimoji="1" lang="ja-JP" altLang="en-US" smtClean="0"/>
-              <a:t>2026/1/7</a:t>
+              <a:t>2026/1/9</a:t>
             </a:fld>
             <a:endParaRPr kumimoji="1" lang="ja-JP" altLang="en-US"/>
           </a:p>
@@ -2184,7 +2184,7 @@
           <a:p>
             <a:fld id="{E9CC885B-4903-4D54-9A93-00025F12DED9}" type="datetimeFigureOut">
               <a:rPr kumimoji="1" lang="ja-JP" altLang="en-US" smtClean="0"/>
-              <a:t>2026/1/7</a:t>
+              <a:t>2026/1/9</a:t>
             </a:fld>
             <a:endParaRPr kumimoji="1" lang="ja-JP" altLang="en-US"/>
           </a:p>
@@ -2297,7 +2297,7 @@
           <a:p>
             <a:fld id="{E9CC885B-4903-4D54-9A93-00025F12DED9}" type="datetimeFigureOut">
               <a:rPr kumimoji="1" lang="ja-JP" altLang="en-US" smtClean="0"/>
-              <a:t>2026/1/7</a:t>
+              <a:t>2026/1/9</a:t>
             </a:fld>
             <a:endParaRPr kumimoji="1" lang="ja-JP" altLang="en-US"/>
           </a:p>
@@ -2640,7 +2640,7 @@
           <a:p>
             <a:fld id="{E9CC885B-4903-4D54-9A93-00025F12DED9}" type="datetimeFigureOut">
               <a:rPr kumimoji="1" lang="ja-JP" altLang="en-US" smtClean="0"/>
-              <a:t>2026/1/7</a:t>
+              <a:t>2026/1/9</a:t>
             </a:fld>
             <a:endParaRPr kumimoji="1" lang="ja-JP" altLang="en-US"/>
           </a:p>
@@ -2928,7 +2928,7 @@
           <a:p>
             <a:fld id="{E9CC885B-4903-4D54-9A93-00025F12DED9}" type="datetimeFigureOut">
               <a:rPr kumimoji="1" lang="ja-JP" altLang="en-US" smtClean="0"/>
-              <a:t>2026/1/7</a:t>
+              <a:t>2026/1/9</a:t>
             </a:fld>
             <a:endParaRPr kumimoji="1" lang="ja-JP" altLang="en-US"/>
           </a:p>
@@ -3201,7 +3201,7 @@
           <a:p>
             <a:fld id="{E9CC885B-4903-4D54-9A93-00025F12DED9}" type="datetimeFigureOut">
               <a:rPr kumimoji="1" lang="ja-JP" altLang="en-US" smtClean="0"/>
-              <a:t>2026/1/7</a:t>
+              <a:t>2026/1/9</a:t>
             </a:fld>
             <a:endParaRPr kumimoji="1" lang="ja-JP" altLang="en-US"/>
           </a:p>
@@ -3772,7 +3772,7 @@
         <p:spPr>
           <a:xfrm>
             <a:off x="567542" y="491954"/>
-            <a:ext cx="2688557" cy="584775"/>
+            <a:ext cx="4104009" cy="584775"/>
           </a:xfrm>
           <a:prstGeom prst="rect">
             <a:avLst/>
@@ -3787,17 +3787,12 @@
           <a:p>
             <a:r>
               <a:rPr kumimoji="1" lang="en-US" altLang="ja-JP" sz="3200" b="1" u="sng" dirty="0"/>
-              <a:t>URP</a:t>
+              <a:t>HD</a:t>
             </a:r>
             <a:r>
               <a:rPr kumimoji="1" lang="ja-JP" altLang="en-US" sz="3200" b="1" u="sng" dirty="0"/>
-              <a:t>と</a:t>
-            </a:r>
-            <a:r>
-              <a:rPr kumimoji="1" lang="en-US" altLang="ja-JP" sz="3200" b="1" u="sng" dirty="0"/>
-              <a:t>HDRP</a:t>
-            </a:r>
-            <a:endParaRPr kumimoji="1" lang="ja-JP" altLang="en-US" sz="3200" b="1" u="sng" dirty="0"/>
+              <a:t>プロジェクト作成</a:t>
+            </a:r>
           </a:p>
         </p:txBody>
       </p:sp>
@@ -3990,7 +3985,7 @@
         <p:spPr>
           <a:xfrm>
             <a:off x="567542" y="491954"/>
-            <a:ext cx="2688557" cy="584775"/>
+            <a:ext cx="4104009" cy="584775"/>
           </a:xfrm>
           <a:prstGeom prst="rect">
             <a:avLst/>
@@ -4005,17 +4000,12 @@
           <a:p>
             <a:r>
               <a:rPr kumimoji="1" lang="en-US" altLang="ja-JP" sz="3200" b="1" u="sng" dirty="0"/>
-              <a:t>URP</a:t>
+              <a:t>HD</a:t>
             </a:r>
             <a:r>
               <a:rPr kumimoji="1" lang="ja-JP" altLang="en-US" sz="3200" b="1" u="sng" dirty="0"/>
-              <a:t>と</a:t>
-            </a:r>
-            <a:r>
-              <a:rPr kumimoji="1" lang="en-US" altLang="ja-JP" sz="3200" b="1" u="sng" dirty="0"/>
-              <a:t>HDRP</a:t>
-            </a:r>
-            <a:endParaRPr kumimoji="1" lang="ja-JP" altLang="en-US" sz="3200" b="1" u="sng" dirty="0"/>
+              <a:t>プロジェクト作成</a:t>
+            </a:r>
           </a:p>
         </p:txBody>
       </p:sp>
@@ -4145,7 +4135,7 @@
         <p:spPr>
           <a:xfrm>
             <a:off x="567542" y="491954"/>
-            <a:ext cx="2688557" cy="584775"/>
+            <a:ext cx="4104009" cy="584775"/>
           </a:xfrm>
           <a:prstGeom prst="rect">
             <a:avLst/>
@@ -4160,17 +4150,12 @@
           <a:p>
             <a:r>
               <a:rPr kumimoji="1" lang="en-US" altLang="ja-JP" sz="3200" b="1" u="sng" dirty="0"/>
-              <a:t>URP</a:t>
+              <a:t>HD</a:t>
             </a:r>
             <a:r>
               <a:rPr kumimoji="1" lang="ja-JP" altLang="en-US" sz="3200" b="1" u="sng" dirty="0"/>
-              <a:t>と</a:t>
-            </a:r>
-            <a:r>
-              <a:rPr kumimoji="1" lang="en-US" altLang="ja-JP" sz="3200" b="1" u="sng" dirty="0"/>
-              <a:t>HDRP</a:t>
-            </a:r>
-            <a:endParaRPr kumimoji="1" lang="ja-JP" altLang="en-US" sz="3200" b="1" u="sng" dirty="0"/>
+              <a:t>プロジェクト作成</a:t>
+            </a:r>
           </a:p>
         </p:txBody>
       </p:sp>
@@ -4575,7 +4560,7 @@
         <p:spPr>
           <a:xfrm>
             <a:off x="567542" y="491954"/>
-            <a:ext cx="2688557" cy="584775"/>
+            <a:ext cx="4104009" cy="584775"/>
           </a:xfrm>
           <a:prstGeom prst="rect">
             <a:avLst/>
@@ -4590,17 +4575,12 @@
           <a:p>
             <a:r>
               <a:rPr kumimoji="1" lang="en-US" altLang="ja-JP" sz="3200" b="1" u="sng" dirty="0"/>
-              <a:t>URP</a:t>
+              <a:t>HD</a:t>
             </a:r>
             <a:r>
               <a:rPr kumimoji="1" lang="ja-JP" altLang="en-US" sz="3200" b="1" u="sng" dirty="0"/>
-              <a:t>と</a:t>
-            </a:r>
-            <a:r>
-              <a:rPr kumimoji="1" lang="en-US" altLang="ja-JP" sz="3200" b="1" u="sng" dirty="0"/>
-              <a:t>HDRP</a:t>
-            </a:r>
-            <a:endParaRPr kumimoji="1" lang="ja-JP" altLang="en-US" sz="3200" b="1" u="sng" dirty="0"/>
+              <a:t>プロジェクト作成</a:t>
+            </a:r>
           </a:p>
         </p:txBody>
       </p:sp>
